--- a/docs/workflows/glm_map_first_level_roadmap.pptx
+++ b/docs/workflows/glm_map_first_level_roadmap.pptx
@@ -3895,7 +3895,7 @@
                 </a:solidFill>
                 <a:latin typeface="Calibri"/>
               </a:rPr>
-              <a:t>fit(g, timeseries, 'AR', 1 / 'robust')</a:t>
+              <a:t>fit(g, timeseries, 'AR', 4 / 'robust')</a:t>
             </a:r>
           </a:p>
         </p:txBody>
@@ -5198,7 +5198,7 @@
                 </a:solidFill>
                 <a:latin typeface="Calibri"/>
               </a:rPr>
-              <a:t>First-level designs are BUILT from event timing: onsets/durations are convolved with a basis set (canonical HRF by default) and stacked across runs with per-run intercepts; entered events are flagged of interest, motion / multiple_regressors as nuisance. Set g.is_timeseries = true to enable AR error models; run_diagnostics recommends a high-pass-filter cutoff (&lt; 5% variance lost) for the regressors and contrasts.</a:t>
+              <a:t>First-level designs are BUILT from event timing: onsets/durations are convolved with a basis set (canonical HRF by default) and stacked across runs with per-run intercepts; entered events are flagged of interest, motion / multiple_regressors as nuisance. Set g.is_timeseries = true to enable AR(p) error models (AR(4) recommended; needs Econometrics + Signal Processing toolboxes) and HP-filter diagnostics; run_diagnostics recommends a high-pass-filter cutoff (&lt; 5% variance lost) for the regressors and contrasts.</a:t>
             </a:r>
           </a:p>
         </p:txBody>
